--- a/slides/13-boosting.pptx
+++ b/slides/13-boosting.pptx
@@ -220,7 +220,7 @@
           <a:p>
             <a:fld id="{A5320152-7289-42ED-97D3-BBB411F9F8C0}" type="datetimeFigureOut">
               <a:rPr lang="en-US" smtClean="0"/>
-              <a:t>3/2/2026</a:t>
+              <a:t>3/3/2026</a:t>
             </a:fld>
             <a:endParaRPr lang="en-US"/>
           </a:p>
@@ -640,7 +640,7 @@
           <a:p>
             <a:fld id="{D1D1EADE-8E88-4C7C-8AC5-FB148DE4940E}" type="datetime1">
               <a:rPr lang="en-US" smtClean="0"/>
-              <a:t>3/2/2026</a:t>
+              <a:t>3/3/2026</a:t>
             </a:fld>
             <a:endParaRPr lang="en-US"/>
           </a:p>
@@ -840,7 +840,7 @@
           <a:p>
             <a:fld id="{EC3C8B9C-477D-492A-96AD-1FC2CC997A73}" type="datetime1">
               <a:rPr lang="en-US" smtClean="0"/>
-              <a:t>3/2/2026</a:t>
+              <a:t>3/3/2026</a:t>
             </a:fld>
             <a:endParaRPr lang="en-US"/>
           </a:p>
@@ -1050,7 +1050,7 @@
           <a:p>
             <a:fld id="{42D3AED5-E26D-4E29-B1B3-7847B6779594}" type="datetime1">
               <a:rPr lang="en-US" smtClean="0"/>
-              <a:t>3/2/2026</a:t>
+              <a:t>3/3/2026</a:t>
             </a:fld>
             <a:endParaRPr lang="en-US"/>
           </a:p>
@@ -1526,7 +1526,7 @@
           <a:p>
             <a:fld id="{157B6794-849E-4626-908B-D15793550EFB}" type="datetime1">
               <a:rPr lang="en-US" smtClean="0"/>
-              <a:t>3/2/2026</a:t>
+              <a:t>3/3/2026</a:t>
             </a:fld>
             <a:endParaRPr lang="en-US"/>
           </a:p>
@@ -1802,7 +1802,7 @@
           <a:p>
             <a:fld id="{63DB64E7-5594-42A3-ADBF-E95A7ACEAD64}" type="datetime1">
               <a:rPr lang="en-US" smtClean="0"/>
-              <a:t>3/2/2026</a:t>
+              <a:t>3/3/2026</a:t>
             </a:fld>
             <a:endParaRPr lang="en-US"/>
           </a:p>
@@ -2075,7 +2075,7 @@
           <a:p>
             <a:fld id="{18462B0B-D248-4FFB-8695-AD7FA4B1284A}" type="datetime1">
               <a:rPr lang="en-US" smtClean="0"/>
-              <a:t>3/2/2026</a:t>
+              <a:t>3/3/2026</a:t>
             </a:fld>
             <a:endParaRPr lang="en-US"/>
           </a:p>
@@ -2498,7 +2498,7 @@
           <a:p>
             <a:fld id="{D0378EFB-9159-4510-B73F-4F0409ADE937}" type="datetime1">
               <a:rPr lang="en-US" smtClean="0"/>
-              <a:t>3/2/2026</a:t>
+              <a:t>3/3/2026</a:t>
             </a:fld>
             <a:endParaRPr lang="en-US"/>
           </a:p>
@@ -2640,7 +2640,7 @@
           <a:p>
             <a:fld id="{89BC9412-2452-4BED-A324-9D8C115361AD}" type="datetime1">
               <a:rPr lang="en-US" smtClean="0"/>
-              <a:t>3/2/2026</a:t>
+              <a:t>3/3/2026</a:t>
             </a:fld>
             <a:endParaRPr lang="en-US"/>
           </a:p>
@@ -2753,7 +2753,7 @@
           <a:p>
             <a:fld id="{F5318F62-D251-40E8-A23C-F4CFE9FEAB41}" type="datetime1">
               <a:rPr lang="en-US" smtClean="0"/>
-              <a:t>3/2/2026</a:t>
+              <a:t>3/3/2026</a:t>
             </a:fld>
             <a:endParaRPr lang="en-US"/>
           </a:p>
@@ -3066,7 +3066,7 @@
           <a:p>
             <a:fld id="{44F76144-149E-4874-93A5-554A0357CF82}" type="datetime1">
               <a:rPr lang="en-US" smtClean="0"/>
-              <a:t>3/2/2026</a:t>
+              <a:t>3/3/2026</a:t>
             </a:fld>
             <a:endParaRPr lang="en-US"/>
           </a:p>
@@ -3359,7 +3359,7 @@
           <a:p>
             <a:fld id="{50BA65D8-0540-4835-AE5C-25D29DBA01BE}" type="datetime1">
               <a:rPr lang="en-US" smtClean="0"/>
-              <a:t>3/2/2026</a:t>
+              <a:t>3/3/2026</a:t>
             </a:fld>
             <a:endParaRPr lang="en-US"/>
           </a:p>
@@ -3601,7 +3601,7 @@
           <a:p>
             <a:fld id="{E31BA835-12AC-4E8F-955A-EA3F4DE2791F}" type="datetime1">
               <a:rPr lang="en-US" smtClean="0"/>
-              <a:t>3/2/2026</a:t>
+              <a:t>3/3/2026</a:t>
             </a:fld>
             <a:endParaRPr lang="en-US"/>
           </a:p>
@@ -4540,8 +4540,8 @@
           <a:chExt cx="0" cy="0"/>
         </a:xfrm>
       </p:grpSpPr>
-      <mc:AlternateContent xmlns:mc="http://schemas.openxmlformats.org/markup-compatibility/2006">
-        <mc:Choice xmlns:a14="http://schemas.microsoft.com/office/drawing/2010/main" Requires="a14">
+      <mc:AlternateContent xmlns:mc="http://schemas.openxmlformats.org/markup-compatibility/2006" xmlns:a14="http://schemas.microsoft.com/office/drawing/2010/main">
+        <mc:Choice Requires="a14">
           <p:sp>
             <p:nvSpPr>
               <p:cNvPr id="329" name="Train a weak learner and make predictions…"/>
@@ -4704,7 +4704,7 @@
             </p:txBody>
           </p:sp>
         </mc:Choice>
-        <mc:Fallback>
+        <mc:Fallback xmlns="">
           <p:sp>
             <p:nvSpPr>
               <p:cNvPr id="329" name="Train a weak learner and make predictions…"/>
@@ -4824,7 +4824,7 @@
           </a:ln>
           <a:extLst>
             <a:ext uri="{C572A759-6A51-4108-AA02-DFA0A04FC94B}">
-              <ma14:wrappingTextBoxFlag xmlns:ma14="http://schemas.microsoft.com/office/mac/drawingml/2011/main" xmlns:a14="http://schemas.microsoft.com/office/drawing/2010/main" xmlns:m="http://schemas.openxmlformats.org/officeDocument/2006/math" xmlns="" val="1"/>
+              <ma14:wrappingTextBoxFlag xmlns="" xmlns:m="http://schemas.openxmlformats.org/officeDocument/2006/math" xmlns:a14="http://schemas.microsoft.com/office/drawing/2010/main" xmlns:ma14="http://schemas.microsoft.com/office/mac/drawingml/2011/main" val="1"/>
             </a:ext>
           </a:extLst>
         </p:spPr>
@@ -4892,7 +4892,7 @@
           </a:ln>
           <a:extLst>
             <a:ext uri="{C572A759-6A51-4108-AA02-DFA0A04FC94B}">
-              <ma14:wrappingTextBoxFlag xmlns:ma14="http://schemas.microsoft.com/office/mac/drawingml/2011/main" xmlns:a14="http://schemas.microsoft.com/office/drawing/2010/main" xmlns:m="http://schemas.openxmlformats.org/officeDocument/2006/math" xmlns="" val="1"/>
+              <ma14:wrappingTextBoxFlag xmlns="" xmlns:m="http://schemas.openxmlformats.org/officeDocument/2006/math" xmlns:a14="http://schemas.microsoft.com/office/drawing/2010/main" xmlns:ma14="http://schemas.microsoft.com/office/mac/drawingml/2011/main" val="1"/>
             </a:ext>
           </a:extLst>
         </p:spPr>
@@ -4973,8 +4973,8 @@
           <a:chExt cx="0" cy="0"/>
         </a:xfrm>
       </p:grpSpPr>
-      <mc:AlternateContent xmlns:mc="http://schemas.openxmlformats.org/markup-compatibility/2006">
-        <mc:Choice xmlns:a14="http://schemas.microsoft.com/office/drawing/2010/main" Requires="a14">
+      <mc:AlternateContent xmlns:mc="http://schemas.openxmlformats.org/markup-compatibility/2006" xmlns:a14="http://schemas.microsoft.com/office/drawing/2010/main">
+        <mc:Choice Requires="a14">
           <p:sp>
             <p:nvSpPr>
               <p:cNvPr id="338" name="Example (with   for simplicity)"/>
@@ -5036,7 +5036,7 @@
             </p:txBody>
           </p:sp>
         </mc:Choice>
-        <mc:Fallback>
+        <mc:Fallback xmlns="">
           <p:sp>
             <p:nvSpPr>
               <p:cNvPr id="338" name="Example (with   for simplicity)"/>
@@ -5976,7 +5976,7 @@
           </a:ln>
           <a:extLst>
             <a:ext uri="{C572A759-6A51-4108-AA02-DFA0A04FC94B}">
-              <ma14:wrappingTextBoxFlag xmlns:ma14="http://schemas.microsoft.com/office/mac/drawingml/2011/main" xmlns:a14="http://schemas.microsoft.com/office/drawing/2010/main" xmlns:m="http://schemas.openxmlformats.org/officeDocument/2006/math" xmlns="" val="1"/>
+              <ma14:wrappingTextBoxFlag xmlns="" xmlns:m="http://schemas.openxmlformats.org/officeDocument/2006/math" xmlns:a14="http://schemas.microsoft.com/office/drawing/2010/main" xmlns:ma14="http://schemas.microsoft.com/office/mac/drawingml/2011/main" val="1"/>
             </a:ext>
           </a:extLst>
         </p:spPr>
@@ -6020,7 +6020,7 @@
           </a:ln>
           <a:extLst>
             <a:ext uri="{C572A759-6A51-4108-AA02-DFA0A04FC94B}">
-              <ma14:wrappingTextBoxFlag xmlns:ma14="http://schemas.microsoft.com/office/mac/drawingml/2011/main" xmlns:a14="http://schemas.microsoft.com/office/drawing/2010/main" xmlns:m="http://schemas.openxmlformats.org/officeDocument/2006/math" xmlns="" val="1"/>
+              <ma14:wrappingTextBoxFlag xmlns="" xmlns:m="http://schemas.openxmlformats.org/officeDocument/2006/math" xmlns:a14="http://schemas.microsoft.com/office/drawing/2010/main" xmlns:ma14="http://schemas.microsoft.com/office/mac/drawingml/2011/main" val="1"/>
             </a:ext>
           </a:extLst>
         </p:spPr>
@@ -6064,7 +6064,7 @@
           </a:ln>
           <a:extLst>
             <a:ext uri="{C572A759-6A51-4108-AA02-DFA0A04FC94B}">
-              <ma14:wrappingTextBoxFlag xmlns:ma14="http://schemas.microsoft.com/office/mac/drawingml/2011/main" xmlns:a14="http://schemas.microsoft.com/office/drawing/2010/main" xmlns:m="http://schemas.openxmlformats.org/officeDocument/2006/math" xmlns="" val="1"/>
+              <ma14:wrappingTextBoxFlag xmlns="" xmlns:m="http://schemas.openxmlformats.org/officeDocument/2006/math" xmlns:a14="http://schemas.microsoft.com/office/drawing/2010/main" xmlns:ma14="http://schemas.microsoft.com/office/mac/drawingml/2011/main" val="1"/>
             </a:ext>
           </a:extLst>
         </p:spPr>
@@ -7039,7 +7039,7 @@
           </a:ln>
           <a:extLst>
             <a:ext uri="{C572A759-6A51-4108-AA02-DFA0A04FC94B}">
-              <ma14:wrappingTextBoxFlag xmlns:ma14="http://schemas.microsoft.com/office/mac/drawingml/2011/main" xmlns:a14="http://schemas.microsoft.com/office/drawing/2010/main" xmlns:m="http://schemas.openxmlformats.org/officeDocument/2006/math" xmlns="" val="1"/>
+              <ma14:wrappingTextBoxFlag xmlns="" xmlns:m="http://schemas.openxmlformats.org/officeDocument/2006/math" xmlns:a14="http://schemas.microsoft.com/office/drawing/2010/main" xmlns:ma14="http://schemas.microsoft.com/office/mac/drawingml/2011/main" val="1"/>
             </a:ext>
           </a:extLst>
         </p:spPr>
@@ -7075,7 +7075,7 @@
           </a:ln>
           <a:extLst>
             <a:ext uri="{C572A759-6A51-4108-AA02-DFA0A04FC94B}">
-              <ma14:wrappingTextBoxFlag xmlns:ma14="http://schemas.microsoft.com/office/mac/drawingml/2011/main" xmlns:a14="http://schemas.microsoft.com/office/drawing/2010/main" xmlns:m="http://schemas.openxmlformats.org/officeDocument/2006/math" xmlns="" val="1"/>
+              <ma14:wrappingTextBoxFlag xmlns="" xmlns:m="http://schemas.openxmlformats.org/officeDocument/2006/math" xmlns:a14="http://schemas.microsoft.com/office/drawing/2010/main" xmlns:ma14="http://schemas.microsoft.com/office/mac/drawingml/2011/main" val="1"/>
             </a:ext>
           </a:extLst>
         </p:spPr>
@@ -8058,7 +8058,7 @@
           </a:ln>
           <a:extLst>
             <a:ext uri="{C572A759-6A51-4108-AA02-DFA0A04FC94B}">
-              <ma14:wrappingTextBoxFlag xmlns:ma14="http://schemas.microsoft.com/office/mac/drawingml/2011/main" xmlns:a14="http://schemas.microsoft.com/office/drawing/2010/main" xmlns:m="http://schemas.openxmlformats.org/officeDocument/2006/math" xmlns="" val="1"/>
+              <ma14:wrappingTextBoxFlag xmlns="" xmlns:m="http://schemas.openxmlformats.org/officeDocument/2006/math" xmlns:a14="http://schemas.microsoft.com/office/drawing/2010/main" xmlns:ma14="http://schemas.microsoft.com/office/mac/drawingml/2011/main" val="1"/>
             </a:ext>
           </a:extLst>
         </p:spPr>
@@ -8102,7 +8102,7 @@
           </a:ln>
           <a:extLst>
             <a:ext uri="{C572A759-6A51-4108-AA02-DFA0A04FC94B}">
-              <ma14:wrappingTextBoxFlag xmlns:ma14="http://schemas.microsoft.com/office/mac/drawingml/2011/main" xmlns:a14="http://schemas.microsoft.com/office/drawing/2010/main" xmlns:m="http://schemas.openxmlformats.org/officeDocument/2006/math" xmlns="" val="1"/>
+              <ma14:wrappingTextBoxFlag xmlns="" xmlns:m="http://schemas.openxmlformats.org/officeDocument/2006/math" xmlns:a14="http://schemas.microsoft.com/office/drawing/2010/main" xmlns:ma14="http://schemas.microsoft.com/office/mac/drawingml/2011/main" val="1"/>
             </a:ext>
           </a:extLst>
         </p:spPr>
@@ -8146,7 +8146,7 @@
           </a:ln>
           <a:extLst>
             <a:ext uri="{C572A759-6A51-4108-AA02-DFA0A04FC94B}">
-              <ma14:wrappingTextBoxFlag xmlns:ma14="http://schemas.microsoft.com/office/mac/drawingml/2011/main" xmlns:a14="http://schemas.microsoft.com/office/drawing/2010/main" xmlns:m="http://schemas.openxmlformats.org/officeDocument/2006/math" xmlns="" val="1"/>
+              <ma14:wrappingTextBoxFlag xmlns="" xmlns:m="http://schemas.openxmlformats.org/officeDocument/2006/math" xmlns:a14="http://schemas.microsoft.com/office/drawing/2010/main" xmlns:ma14="http://schemas.microsoft.com/office/mac/drawingml/2011/main" val="1"/>
             </a:ext>
           </a:extLst>
         </p:spPr>
@@ -9121,7 +9121,7 @@
           </a:ln>
           <a:extLst>
             <a:ext uri="{C572A759-6A51-4108-AA02-DFA0A04FC94B}">
-              <ma14:wrappingTextBoxFlag xmlns:ma14="http://schemas.microsoft.com/office/mac/drawingml/2011/main" xmlns:a14="http://schemas.microsoft.com/office/drawing/2010/main" xmlns:m="http://schemas.openxmlformats.org/officeDocument/2006/math" xmlns="" val="1"/>
+              <ma14:wrappingTextBoxFlag xmlns="" xmlns:m="http://schemas.openxmlformats.org/officeDocument/2006/math" xmlns:a14="http://schemas.microsoft.com/office/drawing/2010/main" xmlns:ma14="http://schemas.microsoft.com/office/mac/drawingml/2011/main" val="1"/>
             </a:ext>
           </a:extLst>
         </p:spPr>
@@ -9165,7 +9165,7 @@
           </a:ln>
           <a:extLst>
             <a:ext uri="{C572A759-6A51-4108-AA02-DFA0A04FC94B}">
-              <ma14:wrappingTextBoxFlag xmlns:ma14="http://schemas.microsoft.com/office/mac/drawingml/2011/main" xmlns:a14="http://schemas.microsoft.com/office/drawing/2010/main" xmlns:m="http://schemas.openxmlformats.org/officeDocument/2006/math" xmlns="" val="1"/>
+              <ma14:wrappingTextBoxFlag xmlns="" xmlns:m="http://schemas.openxmlformats.org/officeDocument/2006/math" xmlns:a14="http://schemas.microsoft.com/office/drawing/2010/main" xmlns:ma14="http://schemas.microsoft.com/office/mac/drawingml/2011/main" val="1"/>
             </a:ext>
           </a:extLst>
         </p:spPr>
@@ -10164,7 +10164,7 @@
           </a:ln>
           <a:extLst>
             <a:ext uri="{C572A759-6A51-4108-AA02-DFA0A04FC94B}">
-              <ma14:wrappingTextBoxFlag xmlns:ma14="http://schemas.microsoft.com/office/mac/drawingml/2011/main" xmlns:a14="http://schemas.microsoft.com/office/drawing/2010/main" xmlns:m="http://schemas.openxmlformats.org/officeDocument/2006/math" xmlns="" val="1"/>
+              <ma14:wrappingTextBoxFlag xmlns="" xmlns:m="http://schemas.openxmlformats.org/officeDocument/2006/math" xmlns:a14="http://schemas.microsoft.com/office/drawing/2010/main" xmlns:ma14="http://schemas.microsoft.com/office/mac/drawingml/2011/main" val="1"/>
             </a:ext>
           </a:extLst>
         </p:spPr>
@@ -10208,7 +10208,7 @@
           </a:ln>
           <a:extLst>
             <a:ext uri="{C572A759-6A51-4108-AA02-DFA0A04FC94B}">
-              <ma14:wrappingTextBoxFlag xmlns:ma14="http://schemas.microsoft.com/office/mac/drawingml/2011/main" xmlns:a14="http://schemas.microsoft.com/office/drawing/2010/main" xmlns:m="http://schemas.openxmlformats.org/officeDocument/2006/math" xmlns="" val="1"/>
+              <ma14:wrappingTextBoxFlag xmlns="" xmlns:m="http://schemas.openxmlformats.org/officeDocument/2006/math" xmlns:a14="http://schemas.microsoft.com/office/drawing/2010/main" xmlns:ma14="http://schemas.microsoft.com/office/mac/drawingml/2011/main" val="1"/>
             </a:ext>
           </a:extLst>
         </p:spPr>
@@ -10252,7 +10252,7 @@
           </a:ln>
           <a:extLst>
             <a:ext uri="{C572A759-6A51-4108-AA02-DFA0A04FC94B}">
-              <ma14:wrappingTextBoxFlag xmlns:ma14="http://schemas.microsoft.com/office/mac/drawingml/2011/main" xmlns:a14="http://schemas.microsoft.com/office/drawing/2010/main" xmlns:m="http://schemas.openxmlformats.org/officeDocument/2006/math" xmlns="" val="1"/>
+              <ma14:wrappingTextBoxFlag xmlns="" xmlns:m="http://schemas.openxmlformats.org/officeDocument/2006/math" xmlns:a14="http://schemas.microsoft.com/office/drawing/2010/main" xmlns:ma14="http://schemas.microsoft.com/office/mac/drawingml/2011/main" val="1"/>
             </a:ext>
           </a:extLst>
         </p:spPr>
@@ -12003,8 +12003,8 @@
           <a:chExt cx="0" cy="0"/>
         </a:xfrm>
       </p:grpSpPr>
-      <mc:AlternateContent xmlns:mc="http://schemas.openxmlformats.org/markup-compatibility/2006">
-        <mc:Choice xmlns:a14="http://schemas.microsoft.com/office/drawing/2010/main" Requires="a14">
+      <mc:AlternateContent xmlns:mc="http://schemas.openxmlformats.org/markup-compatibility/2006" xmlns:a14="http://schemas.microsoft.com/office/drawing/2010/main">
+        <mc:Choice Requires="a14">
           <p:sp>
             <p:nvSpPr>
               <p:cNvPr id="375" name="The concept of “residuals” is a little different in the classification setting…"/>
@@ -12320,7 +12320,7 @@
             </p:txBody>
           </p:sp>
         </mc:Choice>
-        <mc:Fallback>
+        <mc:Fallback xmlns="">
           <p:sp>
             <p:nvSpPr>
               <p:cNvPr id="375" name="The concept of “residuals” is a little different in the classification setting…"/>
@@ -12418,8 +12418,8 @@
           <a:chExt cx="0" cy="0"/>
         </a:xfrm>
       </p:grpSpPr>
-      <mc:AlternateContent xmlns:mc="http://schemas.openxmlformats.org/markup-compatibility/2006">
-        <mc:Choice xmlns:a14="http://schemas.microsoft.com/office/drawing/2010/main" Requires="a14">
+      <mc:AlternateContent xmlns:mc="http://schemas.openxmlformats.org/markup-compatibility/2006" xmlns:a14="http://schemas.microsoft.com/office/drawing/2010/main">
+        <mc:Choice Requires="a14">
           <p:sp>
             <p:nvSpPr>
               <p:cNvPr id="378" name="The gradient of the loss function with respect to p:…"/>
@@ -12863,7 +12863,7 @@
             </p:txBody>
           </p:sp>
         </mc:Choice>
-        <mc:Fallback>
+        <mc:Fallback xmlns="">
           <p:sp>
             <p:nvSpPr>
               <p:cNvPr id="378" name="The gradient of the loss function with respect to p:…"/>
@@ -14986,7 +14986,7 @@
                         </a:solidFill>
                         <a:latin typeface="Cambria Math" panose="02040503050406030204" pitchFamily="18" charset="0"/>
                       </a:rPr>
-                      <m:t>(−</m:t>
+                      <m:t>(</m:t>
                     </m:r>
                     <m:sSub>
                       <m:sSubPr>
@@ -15297,7 +15297,7 @@
                         </a:solidFill>
                         <a:latin typeface="Cambria Math" panose="02040503050406030204" pitchFamily="18" charset="0"/>
                       </a:rPr>
-                      <m:t>(</m:t>
+                      <m:t>(−</m:t>
                     </m:r>
                     <m:sSub>
                       <m:sSubPr>
@@ -15635,8 +15635,8 @@
           <a:chExt cx="0" cy="0"/>
         </a:xfrm>
       </p:grpSpPr>
-      <mc:AlternateContent xmlns:mc="http://schemas.openxmlformats.org/markup-compatibility/2006">
-        <mc:Choice xmlns:a14="http://schemas.microsoft.com/office/drawing/2010/main" Requires="a14">
+      <mc:AlternateContent xmlns:mc="http://schemas.openxmlformats.org/markup-compatibility/2006" xmlns:a14="http://schemas.microsoft.com/office/drawing/2010/main">
+        <mc:Choice Requires="a14">
           <p:sp>
             <p:nvSpPr>
               <p:cNvPr id="318" name="Update final model prediction…"/>
@@ -16147,7 +16147,7 @@
             </p:txBody>
           </p:sp>
         </mc:Choice>
-        <mc:Fallback>
+        <mc:Fallback xmlns="">
           <p:sp>
             <p:nvSpPr>
               <p:cNvPr id="318" name="Update final model prediction…"/>
